--- a/Pregrado/Investigacion en ciencia y tecnologia/Clases/Sesion 05 - Formulación del planteamiento del problema/Presentacion.pptx
+++ b/Pregrado/Investigacion en ciencia y tecnologia/Clases/Sesion 05 - Formulación del planteamiento del problema/Presentacion.pptx
@@ -3371,41 +3371,6 @@
           </a:p>
         </p:txBody>
       </p:sp>
-      <p:sp>
-        <p:nvSpPr>
-          <p:cNvPr id="7" name="TextBox 6"/>
-          <p:cNvSpPr txBox="1"/>
-          <p:nvPr/>
-        </p:nvSpPr>
-        <p:spPr>
-          <a:xfrm>
-            <a:off x="2194560" y="6446520"/>
-            <a:ext cx="5943600" cy="274320"/>
-          </a:xfrm>
-          <a:prstGeom prst="rect">
-            <a:avLst/>
-          </a:prstGeom>
-          <a:noFill/>
-        </p:spPr>
-        <p:txBody>
-          <a:bodyPr wrap="square" anchor="t" lIns="0" rIns="0" tIns="0" bIns="0">
-            <a:spAutoFit/>
-          </a:bodyPr>
-          <a:lstStyle/>
-          <a:p>
-            <a:pPr algn="l"/>
-            <a:r>
-              <a:rPr sz="1000" b="1" i="0">
-                <a:solidFill>
-                  <a:srgbClr val="8F989D"/>
-                </a:solidFill>
-                <a:latin typeface="Calibri"/>
-              </a:rPr>
-              <a:t>Inicio 5:10 pm</a:t>
-            </a:r>
-          </a:p>
-        </p:txBody>
-      </p:sp>
     </p:spTree>
   </p:cSld>
   <p:clrMapOvr>
@@ -3812,41 +3777,6 @@
         </p:nvSpPr>
         <p:spPr>
           <a:xfrm>
-            <a:off x="2194560" y="6446520"/>
-            <a:ext cx="5943600" cy="274320"/>
-          </a:xfrm>
-          <a:prstGeom prst="rect">
-            <a:avLst/>
-          </a:prstGeom>
-          <a:noFill/>
-        </p:spPr>
-        <p:txBody>
-          <a:bodyPr wrap="square" anchor="t" lIns="0" rIns="0" tIns="0" bIns="0">
-            <a:spAutoFit/>
-          </a:bodyPr>
-          <a:lstStyle/>
-          <a:p>
-            <a:pPr algn="l"/>
-            <a:r>
-              <a:rPr sz="1000" b="1" i="0">
-                <a:solidFill>
-                  <a:srgbClr val="8F989D"/>
-                </a:solidFill>
-                <a:latin typeface="Calibri"/>
-              </a:rPr>
-              <a:t>Inicio 5:10 pm</a:t>
-            </a:r>
-          </a:p>
-        </p:txBody>
-      </p:sp>
-      <p:sp>
-        <p:nvSpPr>
-          <p:cNvPr id="6" name="TextBox 5"/>
-          <p:cNvSpPr txBox="1"/>
-          <p:nvPr/>
-        </p:nvSpPr>
-        <p:spPr>
-          <a:xfrm>
             <a:off x="11094415" y="6446520"/>
             <a:ext cx="548640" cy="274320"/>
           </a:xfrm>
@@ -4039,41 +3969,6 @@
       <p:sp>
         <p:nvSpPr>
           <p:cNvPr id="5" name="TextBox 4"/>
-          <p:cNvSpPr txBox="1"/>
-          <p:nvPr/>
-        </p:nvSpPr>
-        <p:spPr>
-          <a:xfrm>
-            <a:off x="2194560" y="6446520"/>
-            <a:ext cx="5943600" cy="274320"/>
-          </a:xfrm>
-          <a:prstGeom prst="rect">
-            <a:avLst/>
-          </a:prstGeom>
-          <a:noFill/>
-        </p:spPr>
-        <p:txBody>
-          <a:bodyPr wrap="square" anchor="t" lIns="0" rIns="0" tIns="0" bIns="0">
-            <a:spAutoFit/>
-          </a:bodyPr>
-          <a:lstStyle/>
-          <a:p>
-            <a:pPr algn="l"/>
-            <a:r>
-              <a:rPr sz="1000" b="1" i="0">
-                <a:solidFill>
-                  <a:srgbClr val="8F989D"/>
-                </a:solidFill>
-                <a:latin typeface="Calibri"/>
-              </a:rPr>
-              <a:t>Inicio 5:10 pm</a:t>
-            </a:r>
-          </a:p>
-        </p:txBody>
-      </p:sp>
-      <p:sp>
-        <p:nvSpPr>
-          <p:cNvPr id="6" name="TextBox 5"/>
           <p:cNvSpPr txBox="1"/>
           <p:nvPr/>
         </p:nvSpPr>
@@ -4609,41 +4504,6 @@
         </p:nvSpPr>
         <p:spPr>
           <a:xfrm>
-            <a:off x="2194560" y="6446520"/>
-            <a:ext cx="5943600" cy="274320"/>
-          </a:xfrm>
-          <a:prstGeom prst="rect">
-            <a:avLst/>
-          </a:prstGeom>
-          <a:noFill/>
-        </p:spPr>
-        <p:txBody>
-          <a:bodyPr wrap="square" anchor="t" lIns="0" rIns="0" tIns="0" bIns="0">
-            <a:spAutoFit/>
-          </a:bodyPr>
-          <a:lstStyle/>
-          <a:p>
-            <a:pPr algn="l"/>
-            <a:r>
-              <a:rPr sz="1000" b="1" i="0">
-                <a:solidFill>
-                  <a:srgbClr val="8F989D"/>
-                </a:solidFill>
-                <a:latin typeface="Calibri"/>
-              </a:rPr>
-              <a:t>Inicio 5:10 pm</a:t>
-            </a:r>
-          </a:p>
-        </p:txBody>
-      </p:sp>
-      <p:sp>
-        <p:nvSpPr>
-          <p:cNvPr id="7" name="TextBox 6"/>
-          <p:cNvSpPr txBox="1"/>
-          <p:nvPr/>
-        </p:nvSpPr>
-        <p:spPr>
-          <a:xfrm>
             <a:off x="11094415" y="6446520"/>
             <a:ext cx="548640" cy="274320"/>
           </a:xfrm>
@@ -4991,41 +4851,6 @@
         </p:nvSpPr>
         <p:spPr>
           <a:xfrm>
-            <a:off x="2194560" y="6446520"/>
-            <a:ext cx="5943600" cy="274320"/>
-          </a:xfrm>
-          <a:prstGeom prst="rect">
-            <a:avLst/>
-          </a:prstGeom>
-          <a:noFill/>
-        </p:spPr>
-        <p:txBody>
-          <a:bodyPr wrap="square" anchor="t" lIns="0" rIns="0" tIns="0" bIns="0">
-            <a:spAutoFit/>
-          </a:bodyPr>
-          <a:lstStyle/>
-          <a:p>
-            <a:pPr algn="l"/>
-            <a:r>
-              <a:rPr sz="1000" b="1" i="0">
-                <a:solidFill>
-                  <a:srgbClr val="8F989D"/>
-                </a:solidFill>
-                <a:latin typeface="Calibri"/>
-              </a:rPr>
-              <a:t>Inicio 5:10 pm</a:t>
-            </a:r>
-          </a:p>
-        </p:txBody>
-      </p:sp>
-      <p:sp>
-        <p:nvSpPr>
-          <p:cNvPr id="6" name="TextBox 5"/>
-          <p:cNvSpPr txBox="1"/>
-          <p:nvPr/>
-        </p:nvSpPr>
-        <p:spPr>
-          <a:xfrm>
             <a:off x="11094415" y="6446520"/>
             <a:ext cx="548640" cy="274320"/>
           </a:xfrm>
@@ -5253,41 +5078,6 @@
         </p:nvSpPr>
         <p:spPr>
           <a:xfrm>
-            <a:off x="2194560" y="6446520"/>
-            <a:ext cx="5943600" cy="274320"/>
-          </a:xfrm>
-          <a:prstGeom prst="rect">
-            <a:avLst/>
-          </a:prstGeom>
-          <a:noFill/>
-        </p:spPr>
-        <p:txBody>
-          <a:bodyPr wrap="square" anchor="t" lIns="0" rIns="0" tIns="0" bIns="0">
-            <a:spAutoFit/>
-          </a:bodyPr>
-          <a:lstStyle/>
-          <a:p>
-            <a:pPr algn="l"/>
-            <a:r>
-              <a:rPr sz="1000" b="1" i="0">
-                <a:solidFill>
-                  <a:srgbClr val="8F989D"/>
-                </a:solidFill>
-                <a:latin typeface="Calibri"/>
-              </a:rPr>
-              <a:t>Inicio 5:10 pm</a:t>
-            </a:r>
-          </a:p>
-        </p:txBody>
-      </p:sp>
-      <p:sp>
-        <p:nvSpPr>
-          <p:cNvPr id="6" name="TextBox 5"/>
-          <p:cNvSpPr txBox="1"/>
-          <p:nvPr/>
-        </p:nvSpPr>
-        <p:spPr>
-          <a:xfrm>
             <a:off x="11094415" y="6446520"/>
             <a:ext cx="548640" cy="274320"/>
           </a:xfrm>
@@ -5671,41 +5461,6 @@
         </p:nvSpPr>
         <p:spPr>
           <a:xfrm>
-            <a:off x="2194560" y="6446520"/>
-            <a:ext cx="5943600" cy="274320"/>
-          </a:xfrm>
-          <a:prstGeom prst="rect">
-            <a:avLst/>
-          </a:prstGeom>
-          <a:noFill/>
-        </p:spPr>
-        <p:txBody>
-          <a:bodyPr wrap="square" anchor="t" lIns="0" rIns="0" tIns="0" bIns="0">
-            <a:spAutoFit/>
-          </a:bodyPr>
-          <a:lstStyle/>
-          <a:p>
-            <a:pPr algn="l"/>
-            <a:r>
-              <a:rPr sz="1000" b="1" i="0">
-                <a:solidFill>
-                  <a:srgbClr val="8F989D"/>
-                </a:solidFill>
-                <a:latin typeface="Calibri"/>
-              </a:rPr>
-              <a:t>Inicio 5:10 pm</a:t>
-            </a:r>
-          </a:p>
-        </p:txBody>
-      </p:sp>
-      <p:sp>
-        <p:nvSpPr>
-          <p:cNvPr id="6" name="TextBox 5"/>
-          <p:cNvSpPr txBox="1"/>
-          <p:nvPr/>
-        </p:nvSpPr>
-        <p:spPr>
-          <a:xfrm>
             <a:off x="11094415" y="6446520"/>
             <a:ext cx="548640" cy="274320"/>
           </a:xfrm>
@@ -5935,41 +5690,6 @@
         </p:nvSpPr>
         <p:spPr>
           <a:xfrm>
-            <a:off x="2194560" y="6446520"/>
-            <a:ext cx="5943600" cy="274320"/>
-          </a:xfrm>
-          <a:prstGeom prst="rect">
-            <a:avLst/>
-          </a:prstGeom>
-          <a:noFill/>
-        </p:spPr>
-        <p:txBody>
-          <a:bodyPr wrap="square" anchor="t" lIns="0" rIns="0" tIns="0" bIns="0">
-            <a:spAutoFit/>
-          </a:bodyPr>
-          <a:lstStyle/>
-          <a:p>
-            <a:pPr algn="l"/>
-            <a:r>
-              <a:rPr sz="1000" b="1" i="0">
-                <a:solidFill>
-                  <a:srgbClr val="8F989D"/>
-                </a:solidFill>
-                <a:latin typeface="Calibri"/>
-              </a:rPr>
-              <a:t>Inicio 5:10 pm</a:t>
-            </a:r>
-          </a:p>
-        </p:txBody>
-      </p:sp>
-      <p:sp>
-        <p:nvSpPr>
-          <p:cNvPr id="6" name="TextBox 5"/>
-          <p:cNvSpPr txBox="1"/>
-          <p:nvPr/>
-        </p:nvSpPr>
-        <p:spPr>
-          <a:xfrm>
             <a:off x="11094415" y="6446520"/>
             <a:ext cx="548640" cy="274320"/>
           </a:xfrm>
@@ -6419,41 +6139,6 @@
         </p:nvSpPr>
         <p:spPr>
           <a:xfrm>
-            <a:off x="2194560" y="6446520"/>
-            <a:ext cx="5943600" cy="274320"/>
-          </a:xfrm>
-          <a:prstGeom prst="rect">
-            <a:avLst/>
-          </a:prstGeom>
-          <a:noFill/>
-        </p:spPr>
-        <p:txBody>
-          <a:bodyPr wrap="square" anchor="t" lIns="0" rIns="0" tIns="0" bIns="0">
-            <a:spAutoFit/>
-          </a:bodyPr>
-          <a:lstStyle/>
-          <a:p>
-            <a:pPr algn="l"/>
-            <a:r>
-              <a:rPr sz="1000" b="1" i="0">
-                <a:solidFill>
-                  <a:srgbClr val="8F989D"/>
-                </a:solidFill>
-                <a:latin typeface="Calibri"/>
-              </a:rPr>
-              <a:t>Inicio 5:10 pm</a:t>
-            </a:r>
-          </a:p>
-        </p:txBody>
-      </p:sp>
-      <p:sp>
-        <p:nvSpPr>
-          <p:cNvPr id="11" name="TextBox 10"/>
-          <p:cNvSpPr txBox="1"/>
-          <p:nvPr/>
-        </p:nvSpPr>
-        <p:spPr>
-          <a:xfrm>
             <a:off x="11094415" y="6446520"/>
             <a:ext cx="548640" cy="274320"/>
           </a:xfrm>
@@ -6697,41 +6382,6 @@
         </p:nvSpPr>
         <p:spPr>
           <a:xfrm>
-            <a:off x="2194560" y="6446520"/>
-            <a:ext cx="5943600" cy="274320"/>
-          </a:xfrm>
-          <a:prstGeom prst="rect">
-            <a:avLst/>
-          </a:prstGeom>
-          <a:noFill/>
-        </p:spPr>
-        <p:txBody>
-          <a:bodyPr wrap="square" anchor="t" lIns="0" rIns="0" tIns="0" bIns="0">
-            <a:spAutoFit/>
-          </a:bodyPr>
-          <a:lstStyle/>
-          <a:p>
-            <a:pPr algn="l"/>
-            <a:r>
-              <a:rPr sz="1000" b="1" i="0">
-                <a:solidFill>
-                  <a:srgbClr val="8F989D"/>
-                </a:solidFill>
-                <a:latin typeface="Calibri"/>
-              </a:rPr>
-              <a:t>Inicio 5:10 pm</a:t>
-            </a:r>
-          </a:p>
-        </p:txBody>
-      </p:sp>
-      <p:sp>
-        <p:nvSpPr>
-          <p:cNvPr id="7" name="TextBox 6"/>
-          <p:cNvSpPr txBox="1"/>
-          <p:nvPr/>
-        </p:nvSpPr>
-        <p:spPr>
-          <a:xfrm>
             <a:off x="11094415" y="6446520"/>
             <a:ext cx="548640" cy="274320"/>
           </a:xfrm>
@@ -7327,41 +6977,6 @@
         </p:nvSpPr>
         <p:spPr>
           <a:xfrm>
-            <a:off x="2194560" y="6446520"/>
-            <a:ext cx="5943600" cy="274320"/>
-          </a:xfrm>
-          <a:prstGeom prst="rect">
-            <a:avLst/>
-          </a:prstGeom>
-          <a:noFill/>
-        </p:spPr>
-        <p:txBody>
-          <a:bodyPr wrap="square" anchor="t" lIns="0" rIns="0" tIns="0" bIns="0">
-            <a:spAutoFit/>
-          </a:bodyPr>
-          <a:lstStyle/>
-          <a:p>
-            <a:pPr algn="l"/>
-            <a:r>
-              <a:rPr sz="1000" b="1" i="0">
-                <a:solidFill>
-                  <a:srgbClr val="8F989D"/>
-                </a:solidFill>
-                <a:latin typeface="Calibri"/>
-              </a:rPr>
-              <a:t>Inicio 5:10 pm</a:t>
-            </a:r>
-          </a:p>
-        </p:txBody>
-      </p:sp>
-      <p:sp>
-        <p:nvSpPr>
-          <p:cNvPr id="6" name="TextBox 5"/>
-          <p:cNvSpPr txBox="1"/>
-          <p:nvPr/>
-        </p:nvSpPr>
-        <p:spPr>
-          <a:xfrm>
             <a:off x="11094415" y="6446520"/>
             <a:ext cx="548640" cy="274320"/>
           </a:xfrm>
@@ -7391,7 +7006,7 @@
       </p:sp>
       <p:sp>
         <p:nvSpPr>
-          <p:cNvPr id="7" name="TextBox 6"/>
+          <p:cNvPr id="6" name="TextBox 5"/>
           <p:cNvSpPr txBox="1"/>
           <p:nvPr/>
         </p:nvSpPr>
@@ -7793,41 +7408,6 @@
         </p:nvSpPr>
         <p:spPr>
           <a:xfrm>
-            <a:off x="2194560" y="6446520"/>
-            <a:ext cx="5943600" cy="274320"/>
-          </a:xfrm>
-          <a:prstGeom prst="rect">
-            <a:avLst/>
-          </a:prstGeom>
-          <a:noFill/>
-        </p:spPr>
-        <p:txBody>
-          <a:bodyPr wrap="square" anchor="t" lIns="0" rIns="0" tIns="0" bIns="0">
-            <a:spAutoFit/>
-          </a:bodyPr>
-          <a:lstStyle/>
-          <a:p>
-            <a:pPr algn="l"/>
-            <a:r>
-              <a:rPr sz="1000" b="1" i="0">
-                <a:solidFill>
-                  <a:srgbClr val="8F989D"/>
-                </a:solidFill>
-                <a:latin typeface="Calibri"/>
-              </a:rPr>
-              <a:t>Inicio 5:10 pm</a:t>
-            </a:r>
-          </a:p>
-        </p:txBody>
-      </p:sp>
-      <p:sp>
-        <p:nvSpPr>
-          <p:cNvPr id="6" name="TextBox 5"/>
-          <p:cNvSpPr txBox="1"/>
-          <p:nvPr/>
-        </p:nvSpPr>
-        <p:spPr>
-          <a:xfrm>
             <a:off x="11094415" y="6446520"/>
             <a:ext cx="548640" cy="274320"/>
           </a:xfrm>
@@ -7857,7 +7437,7 @@
       </p:sp>
       <p:sp>
         <p:nvSpPr>
-          <p:cNvPr id="7" name="TextBox 6"/>
+          <p:cNvPr id="6" name="TextBox 5"/>
           <p:cNvSpPr txBox="1"/>
           <p:nvPr/>
         </p:nvSpPr>
@@ -8477,41 +8057,6 @@
         </p:nvSpPr>
         <p:spPr>
           <a:xfrm>
-            <a:off x="2194560" y="6446520"/>
-            <a:ext cx="5943600" cy="274320"/>
-          </a:xfrm>
-          <a:prstGeom prst="rect">
-            <a:avLst/>
-          </a:prstGeom>
-          <a:noFill/>
-        </p:spPr>
-        <p:txBody>
-          <a:bodyPr wrap="square" anchor="t" lIns="0" rIns="0" tIns="0" bIns="0">
-            <a:spAutoFit/>
-          </a:bodyPr>
-          <a:lstStyle/>
-          <a:p>
-            <a:pPr algn="l"/>
-            <a:r>
-              <a:rPr sz="1000" b="1" i="0">
-                <a:solidFill>
-                  <a:srgbClr val="8F989D"/>
-                </a:solidFill>
-                <a:latin typeface="Calibri"/>
-              </a:rPr>
-              <a:t>Inicio 5:10 pm</a:t>
-            </a:r>
-          </a:p>
-        </p:txBody>
-      </p:sp>
-      <p:sp>
-        <p:nvSpPr>
-          <p:cNvPr id="6" name="TextBox 5"/>
-          <p:cNvSpPr txBox="1"/>
-          <p:nvPr/>
-        </p:nvSpPr>
-        <p:spPr>
-          <a:xfrm>
             <a:off x="11094415" y="6446520"/>
             <a:ext cx="548640" cy="274320"/>
           </a:xfrm>
@@ -8945,41 +8490,6 @@
         </p:nvSpPr>
         <p:spPr>
           <a:xfrm>
-            <a:off x="2194560" y="6446520"/>
-            <a:ext cx="5943600" cy="274320"/>
-          </a:xfrm>
-          <a:prstGeom prst="rect">
-            <a:avLst/>
-          </a:prstGeom>
-          <a:noFill/>
-        </p:spPr>
-        <p:txBody>
-          <a:bodyPr wrap="square" anchor="t" lIns="0" rIns="0" tIns="0" bIns="0">
-            <a:spAutoFit/>
-          </a:bodyPr>
-          <a:lstStyle/>
-          <a:p>
-            <a:pPr algn="l"/>
-            <a:r>
-              <a:rPr sz="1000" b="1" i="0">
-                <a:solidFill>
-                  <a:srgbClr val="8F989D"/>
-                </a:solidFill>
-                <a:latin typeface="Calibri"/>
-              </a:rPr>
-              <a:t>Inicio 5:10 pm</a:t>
-            </a:r>
-          </a:p>
-        </p:txBody>
-      </p:sp>
-      <p:sp>
-        <p:nvSpPr>
-          <p:cNvPr id="6" name="TextBox 5"/>
-          <p:cNvSpPr txBox="1"/>
-          <p:nvPr/>
-        </p:nvSpPr>
-        <p:spPr>
-          <a:xfrm>
             <a:off x="11094415" y="6446520"/>
             <a:ext cx="548640" cy="274320"/>
           </a:xfrm>
@@ -9211,41 +8721,6 @@
         </p:nvSpPr>
         <p:spPr>
           <a:xfrm>
-            <a:off x="2194560" y="6446520"/>
-            <a:ext cx="5943600" cy="274320"/>
-          </a:xfrm>
-          <a:prstGeom prst="rect">
-            <a:avLst/>
-          </a:prstGeom>
-          <a:noFill/>
-        </p:spPr>
-        <p:txBody>
-          <a:bodyPr wrap="square" anchor="t" lIns="0" rIns="0" tIns="0" bIns="0">
-            <a:spAutoFit/>
-          </a:bodyPr>
-          <a:lstStyle/>
-          <a:p>
-            <a:pPr algn="l"/>
-            <a:r>
-              <a:rPr sz="1000" b="1" i="0">
-                <a:solidFill>
-                  <a:srgbClr val="8F989D"/>
-                </a:solidFill>
-                <a:latin typeface="Calibri"/>
-              </a:rPr>
-              <a:t>Inicio 5:10 pm</a:t>
-            </a:r>
-          </a:p>
-        </p:txBody>
-      </p:sp>
-      <p:sp>
-        <p:nvSpPr>
-          <p:cNvPr id="6" name="TextBox 5"/>
-          <p:cNvSpPr txBox="1"/>
-          <p:nvPr/>
-        </p:nvSpPr>
-        <p:spPr>
-          <a:xfrm>
             <a:off x="11094415" y="6446520"/>
             <a:ext cx="548640" cy="274320"/>
           </a:xfrm>
@@ -9697,41 +9172,6 @@
         </p:nvSpPr>
         <p:spPr>
           <a:xfrm>
-            <a:off x="2194560" y="6446520"/>
-            <a:ext cx="5943600" cy="274320"/>
-          </a:xfrm>
-          <a:prstGeom prst="rect">
-            <a:avLst/>
-          </a:prstGeom>
-          <a:noFill/>
-        </p:spPr>
-        <p:txBody>
-          <a:bodyPr wrap="square" anchor="t" lIns="0" rIns="0" tIns="0" bIns="0">
-            <a:spAutoFit/>
-          </a:bodyPr>
-          <a:lstStyle/>
-          <a:p>
-            <a:pPr algn="l"/>
-            <a:r>
-              <a:rPr sz="1000" b="1" i="0">
-                <a:solidFill>
-                  <a:srgbClr val="8F989D"/>
-                </a:solidFill>
-                <a:latin typeface="Calibri"/>
-              </a:rPr>
-              <a:t>Inicio 5:10 pm</a:t>
-            </a:r>
-          </a:p>
-        </p:txBody>
-      </p:sp>
-      <p:sp>
-        <p:nvSpPr>
-          <p:cNvPr id="6" name="TextBox 5"/>
-          <p:cNvSpPr txBox="1"/>
-          <p:nvPr/>
-        </p:nvSpPr>
-        <p:spPr>
-          <a:xfrm>
             <a:off x="11094415" y="6446520"/>
             <a:ext cx="548640" cy="274320"/>
           </a:xfrm>
@@ -9978,41 +9418,6 @@
           </a:p>
         </p:txBody>
       </p:sp>
-      <p:sp>
-        <p:nvSpPr>
-          <p:cNvPr id="7" name="TextBox 6"/>
-          <p:cNvSpPr txBox="1"/>
-          <p:nvPr/>
-        </p:nvSpPr>
-        <p:spPr>
-          <a:xfrm>
-            <a:off x="2194560" y="6446520"/>
-            <a:ext cx="5943600" cy="274320"/>
-          </a:xfrm>
-          <a:prstGeom prst="rect">
-            <a:avLst/>
-          </a:prstGeom>
-          <a:noFill/>
-        </p:spPr>
-        <p:txBody>
-          <a:bodyPr wrap="square" anchor="t" lIns="0" rIns="0" tIns="0" bIns="0">
-            <a:spAutoFit/>
-          </a:bodyPr>
-          <a:lstStyle/>
-          <a:p>
-            <a:pPr algn="l"/>
-            <a:r>
-              <a:rPr sz="1000" b="1" i="0">
-                <a:solidFill>
-                  <a:srgbClr val="8F989D"/>
-                </a:solidFill>
-                <a:latin typeface="Calibri"/>
-              </a:rPr>
-              <a:t>Inicio 5:10 pm</a:t>
-            </a:r>
-          </a:p>
-        </p:txBody>
-      </p:sp>
     </p:spTree>
   </p:cSld>
   <p:clrMapOvr>
@@ -10455,41 +9860,6 @@
         </p:nvSpPr>
         <p:spPr>
           <a:xfrm>
-            <a:off x="2194560" y="6446520"/>
-            <a:ext cx="5943600" cy="274320"/>
-          </a:xfrm>
-          <a:prstGeom prst="rect">
-            <a:avLst/>
-          </a:prstGeom>
-          <a:noFill/>
-        </p:spPr>
-        <p:txBody>
-          <a:bodyPr wrap="square" anchor="t" lIns="0" rIns="0" tIns="0" bIns="0">
-            <a:spAutoFit/>
-          </a:bodyPr>
-          <a:lstStyle/>
-          <a:p>
-            <a:pPr algn="l"/>
-            <a:r>
-              <a:rPr sz="1000" b="1" i="0">
-                <a:solidFill>
-                  <a:srgbClr val="8F989D"/>
-                </a:solidFill>
-                <a:latin typeface="Calibri"/>
-              </a:rPr>
-              <a:t>Inicio 5:10 pm</a:t>
-            </a:r>
-          </a:p>
-        </p:txBody>
-      </p:sp>
-      <p:sp>
-        <p:nvSpPr>
-          <p:cNvPr id="6" name="TextBox 5"/>
-          <p:cNvSpPr txBox="1"/>
-          <p:nvPr/>
-        </p:nvSpPr>
-        <p:spPr>
-          <a:xfrm>
             <a:off x="11094415" y="6446520"/>
             <a:ext cx="548640" cy="274320"/>
           </a:xfrm>
@@ -10941,41 +10311,6 @@
         </p:nvSpPr>
         <p:spPr>
           <a:xfrm>
-            <a:off x="2194560" y="6446520"/>
-            <a:ext cx="5943600" cy="274320"/>
-          </a:xfrm>
-          <a:prstGeom prst="rect">
-            <a:avLst/>
-          </a:prstGeom>
-          <a:noFill/>
-        </p:spPr>
-        <p:txBody>
-          <a:bodyPr wrap="square" anchor="t" lIns="0" rIns="0" tIns="0" bIns="0">
-            <a:spAutoFit/>
-          </a:bodyPr>
-          <a:lstStyle/>
-          <a:p>
-            <a:pPr algn="l"/>
-            <a:r>
-              <a:rPr sz="1000" b="1" i="0">
-                <a:solidFill>
-                  <a:srgbClr val="8F989D"/>
-                </a:solidFill>
-                <a:latin typeface="Calibri"/>
-              </a:rPr>
-              <a:t>Inicio 5:10 pm</a:t>
-            </a:r>
-          </a:p>
-        </p:txBody>
-      </p:sp>
-      <p:sp>
-        <p:nvSpPr>
-          <p:cNvPr id="6" name="TextBox 5"/>
-          <p:cNvSpPr txBox="1"/>
-          <p:nvPr/>
-        </p:nvSpPr>
-        <p:spPr>
-          <a:xfrm>
             <a:off x="11094415" y="6446520"/>
             <a:ext cx="548640" cy="274320"/>
           </a:xfrm>
@@ -11202,41 +10537,6 @@
       <p:sp>
         <p:nvSpPr>
           <p:cNvPr id="5" name="TextBox 4"/>
-          <p:cNvSpPr txBox="1"/>
-          <p:nvPr/>
-        </p:nvSpPr>
-        <p:spPr>
-          <a:xfrm>
-            <a:off x="2194560" y="6446520"/>
-            <a:ext cx="5943600" cy="274320"/>
-          </a:xfrm>
-          <a:prstGeom prst="rect">
-            <a:avLst/>
-          </a:prstGeom>
-          <a:noFill/>
-        </p:spPr>
-        <p:txBody>
-          <a:bodyPr wrap="square" anchor="t" lIns="0" rIns="0" tIns="0" bIns="0">
-            <a:spAutoFit/>
-          </a:bodyPr>
-          <a:lstStyle/>
-          <a:p>
-            <a:pPr algn="l"/>
-            <a:r>
-              <a:rPr sz="1000" b="1" i="0">
-                <a:solidFill>
-                  <a:srgbClr val="8F989D"/>
-                </a:solidFill>
-                <a:latin typeface="Calibri"/>
-              </a:rPr>
-              <a:t>Inicio 5:10 pm</a:t>
-            </a:r>
-          </a:p>
-        </p:txBody>
-      </p:sp>
-      <p:sp>
-        <p:nvSpPr>
-          <p:cNvPr id="6" name="TextBox 5"/>
           <p:cNvSpPr txBox="1"/>
           <p:nvPr/>
         </p:nvSpPr>
@@ -12102,41 +11402,6 @@
         </p:nvSpPr>
         <p:spPr>
           <a:xfrm>
-            <a:off x="2194560" y="6446520"/>
-            <a:ext cx="5943600" cy="274320"/>
-          </a:xfrm>
-          <a:prstGeom prst="rect">
-            <a:avLst/>
-          </a:prstGeom>
-          <a:noFill/>
-        </p:spPr>
-        <p:txBody>
-          <a:bodyPr wrap="square" anchor="t" lIns="0" rIns="0" tIns="0" bIns="0">
-            <a:spAutoFit/>
-          </a:bodyPr>
-          <a:lstStyle/>
-          <a:p>
-            <a:pPr algn="l"/>
-            <a:r>
-              <a:rPr sz="1000" b="1" i="0">
-                <a:solidFill>
-                  <a:srgbClr val="8F989D"/>
-                </a:solidFill>
-                <a:latin typeface="Calibri"/>
-              </a:rPr>
-              <a:t>Inicio 5:10 pm</a:t>
-            </a:r>
-          </a:p>
-        </p:txBody>
-      </p:sp>
-      <p:sp>
-        <p:nvSpPr>
-          <p:cNvPr id="7" name="TextBox 6"/>
-          <p:cNvSpPr txBox="1"/>
-          <p:nvPr/>
-        </p:nvSpPr>
-        <p:spPr>
-          <a:xfrm>
             <a:off x="11094415" y="6446520"/>
             <a:ext cx="548640" cy="274320"/>
           </a:xfrm>
@@ -12702,41 +11967,6 @@
         </p:nvSpPr>
         <p:spPr>
           <a:xfrm>
-            <a:off x="2194560" y="6446520"/>
-            <a:ext cx="5943600" cy="274320"/>
-          </a:xfrm>
-          <a:prstGeom prst="rect">
-            <a:avLst/>
-          </a:prstGeom>
-          <a:noFill/>
-        </p:spPr>
-        <p:txBody>
-          <a:bodyPr wrap="square" anchor="t" lIns="0" rIns="0" tIns="0" bIns="0">
-            <a:spAutoFit/>
-          </a:bodyPr>
-          <a:lstStyle/>
-          <a:p>
-            <a:pPr algn="l"/>
-            <a:r>
-              <a:rPr sz="1000" b="1" i="0">
-                <a:solidFill>
-                  <a:srgbClr val="8F989D"/>
-                </a:solidFill>
-                <a:latin typeface="Calibri"/>
-              </a:rPr>
-              <a:t>Inicio 5:10 pm</a:t>
-            </a:r>
-          </a:p>
-        </p:txBody>
-      </p:sp>
-      <p:sp>
-        <p:nvSpPr>
-          <p:cNvPr id="7" name="TextBox 6"/>
-          <p:cNvSpPr txBox="1"/>
-          <p:nvPr/>
-        </p:nvSpPr>
-        <p:spPr>
-          <a:xfrm>
             <a:off x="11094415" y="6446520"/>
             <a:ext cx="548640" cy="274320"/>
           </a:xfrm>
@@ -13086,41 +12316,6 @@
         </p:nvSpPr>
         <p:spPr>
           <a:xfrm>
-            <a:off x="2194560" y="6446520"/>
-            <a:ext cx="5943600" cy="274320"/>
-          </a:xfrm>
-          <a:prstGeom prst="rect">
-            <a:avLst/>
-          </a:prstGeom>
-          <a:noFill/>
-        </p:spPr>
-        <p:txBody>
-          <a:bodyPr wrap="square" anchor="t" lIns="0" rIns="0" tIns="0" bIns="0">
-            <a:spAutoFit/>
-          </a:bodyPr>
-          <a:lstStyle/>
-          <a:p>
-            <a:pPr algn="l"/>
-            <a:r>
-              <a:rPr sz="1000" b="1" i="0">
-                <a:solidFill>
-                  <a:srgbClr val="8F989D"/>
-                </a:solidFill>
-                <a:latin typeface="Calibri"/>
-              </a:rPr>
-              <a:t>Inicio 5:10 pm</a:t>
-            </a:r>
-          </a:p>
-        </p:txBody>
-      </p:sp>
-      <p:sp>
-        <p:nvSpPr>
-          <p:cNvPr id="6" name="TextBox 5"/>
-          <p:cNvSpPr txBox="1"/>
-          <p:nvPr/>
-        </p:nvSpPr>
-        <p:spPr>
-          <a:xfrm>
             <a:off x="11094415" y="6446520"/>
             <a:ext cx="548640" cy="274320"/>
           </a:xfrm>
@@ -13420,41 +12615,6 @@
         </p:nvSpPr>
         <p:spPr>
           <a:xfrm>
-            <a:off x="2194560" y="6446520"/>
-            <a:ext cx="5943600" cy="274320"/>
-          </a:xfrm>
-          <a:prstGeom prst="rect">
-            <a:avLst/>
-          </a:prstGeom>
-          <a:noFill/>
-        </p:spPr>
-        <p:txBody>
-          <a:bodyPr wrap="square" anchor="t" lIns="0" rIns="0" tIns="0" bIns="0">
-            <a:spAutoFit/>
-          </a:bodyPr>
-          <a:lstStyle/>
-          <a:p>
-            <a:pPr algn="l"/>
-            <a:r>
-              <a:rPr sz="1000" b="1" i="0">
-                <a:solidFill>
-                  <a:srgbClr val="8F989D"/>
-                </a:solidFill>
-                <a:latin typeface="Calibri"/>
-              </a:rPr>
-              <a:t>Inicio 5:10 pm</a:t>
-            </a:r>
-          </a:p>
-        </p:txBody>
-      </p:sp>
-      <p:sp>
-        <p:nvSpPr>
-          <p:cNvPr id="6" name="TextBox 5"/>
-          <p:cNvSpPr txBox="1"/>
-          <p:nvPr/>
-        </p:nvSpPr>
-        <p:spPr>
-          <a:xfrm>
             <a:off x="11094415" y="6446520"/>
             <a:ext cx="548640" cy="274320"/>
           </a:xfrm>
@@ -13484,7 +12644,7 @@
       </p:sp>
       <p:sp>
         <p:nvSpPr>
-          <p:cNvPr id="7" name="TextBox 6"/>
+          <p:cNvPr id="6" name="TextBox 5"/>
           <p:cNvSpPr txBox="1"/>
           <p:nvPr/>
         </p:nvSpPr>
